--- a/Blinkit Analysis.pptx
+++ b/Blinkit Analysis.pptx
@@ -114,6 +114,65 @@
 </p:presentation>
 </file>
 
+<file path=ppt/changesInfos/changesInfo1.xml><?xml version="1.0" encoding="utf-8"?>
+<pc:chgInfo xmlns:a="http://schemas.openxmlformats.org/drawingml/2006/main" xmlns:r="http://schemas.openxmlformats.org/officeDocument/2006/relationships" xmlns:ac="http://schemas.microsoft.com/office/drawing/2013/main/command" xmlns:pc="http://schemas.microsoft.com/office/powerpoint/2013/main/command">
+  <pc:docChgLst>
+    <pc:chgData name="chennoji vamshi" userId="a162e059365eb882" providerId="LiveId" clId="{D449135C-F0CF-4F08-AFB4-D1E7408DE5B6}"/>
+    <pc:docChg chg="custSel modSld">
+      <pc:chgData name="chennoji vamshi" userId="a162e059365eb882" providerId="LiveId" clId="{D449135C-F0CF-4F08-AFB4-D1E7408DE5B6}" dt="2026-08-17T18:26:10.120" v="2" actId="478"/>
+      <pc:docMkLst>
+        <pc:docMk/>
+      </pc:docMkLst>
+      <pc:sldChg chg="delSp mod">
+        <pc:chgData name="chennoji vamshi" userId="a162e059365eb882" providerId="LiveId" clId="{D449135C-F0CF-4F08-AFB4-D1E7408DE5B6}" dt="2026-08-17T18:26:00.874" v="0" actId="478"/>
+        <pc:sldMkLst>
+          <pc:docMk/>
+          <pc:sldMk cId="854288352" sldId="257"/>
+        </pc:sldMkLst>
+        <pc:picChg chg="del">
+          <ac:chgData name="chennoji vamshi" userId="a162e059365eb882" providerId="LiveId" clId="{D449135C-F0CF-4F08-AFB4-D1E7408DE5B6}" dt="2026-08-17T18:26:00.874" v="0" actId="478"/>
+          <ac:picMkLst>
+            <pc:docMk/>
+            <pc:sldMk cId="854288352" sldId="257"/>
+            <ac:picMk id="13" creationId="{736985F1-78C3-EC87-83A0-2D323CD4C9C0}"/>
+          </ac:picMkLst>
+        </pc:picChg>
+      </pc:sldChg>
+      <pc:sldChg chg="delSp mod">
+        <pc:chgData name="chennoji vamshi" userId="a162e059365eb882" providerId="LiveId" clId="{D449135C-F0CF-4F08-AFB4-D1E7408DE5B6}" dt="2026-08-17T18:26:05.479" v="1" actId="478"/>
+        <pc:sldMkLst>
+          <pc:docMk/>
+          <pc:sldMk cId="3865209502" sldId="258"/>
+        </pc:sldMkLst>
+        <pc:picChg chg="del">
+          <ac:chgData name="chennoji vamshi" userId="a162e059365eb882" providerId="LiveId" clId="{D449135C-F0CF-4F08-AFB4-D1E7408DE5B6}" dt="2026-08-17T18:26:05.479" v="1" actId="478"/>
+          <ac:picMkLst>
+            <pc:docMk/>
+            <pc:sldMk cId="3865209502" sldId="258"/>
+            <ac:picMk id="12" creationId="{8D56A6E6-9FEB-E12A-1F6A-8FCBFFF9CFAD}"/>
+          </ac:picMkLst>
+        </pc:picChg>
+      </pc:sldChg>
+      <pc:sldChg chg="delSp mod">
+        <pc:chgData name="chennoji vamshi" userId="a162e059365eb882" providerId="LiveId" clId="{D449135C-F0CF-4F08-AFB4-D1E7408DE5B6}" dt="2026-08-17T18:26:10.120" v="2" actId="478"/>
+        <pc:sldMkLst>
+          <pc:docMk/>
+          <pc:sldMk cId="1262944802" sldId="259"/>
+        </pc:sldMkLst>
+        <pc:picChg chg="del">
+          <ac:chgData name="chennoji vamshi" userId="a162e059365eb882" providerId="LiveId" clId="{D449135C-F0CF-4F08-AFB4-D1E7408DE5B6}" dt="2026-08-17T18:26:10.120" v="2" actId="478"/>
+          <ac:picMkLst>
+            <pc:docMk/>
+            <pc:sldMk cId="1262944802" sldId="259"/>
+            <ac:picMk id="12" creationId="{8D56A6E6-9FEB-E12A-1F6A-8FCBFFF9CFAD}"/>
+          </ac:picMkLst>
+        </pc:picChg>
+      </pc:sldChg>
+    </pc:docChg>
+  </pc:docChgLst>
+</pc:chgInfo>
+</file>
+
 <file path=ppt/slideLayouts/slideLayout1.xml><?xml version="1.0" encoding="utf-8"?>
 <p:sldLayout xmlns:a="http://schemas.openxmlformats.org/drawingml/2006/main" xmlns:r="http://schemas.openxmlformats.org/officeDocument/2006/relationships" xmlns:p="http://schemas.openxmlformats.org/presentationml/2006/main" type="title" preserve="1">
   <p:cSld name="Title Slide">
@@ -263,7 +322,7 @@
           <a:p>
             <a:fld id="{A8B7FD77-64CE-4E94-98DD-310047DA4970}" type="datetimeFigureOut">
               <a:rPr lang="en-IN" smtClean="0"/>
-              <a:t>06-12-2025</a:t>
+              <a:t>17-08-2026</a:t>
             </a:fld>
             <a:endParaRPr lang="en-IN"/>
           </a:p>
@@ -463,7 +522,7 @@
           <a:p>
             <a:fld id="{A8B7FD77-64CE-4E94-98DD-310047DA4970}" type="datetimeFigureOut">
               <a:rPr lang="en-IN" smtClean="0"/>
-              <a:t>06-12-2025</a:t>
+              <a:t>17-08-2026</a:t>
             </a:fld>
             <a:endParaRPr lang="en-IN"/>
           </a:p>
@@ -673,7 +732,7 @@
           <a:p>
             <a:fld id="{A8B7FD77-64CE-4E94-98DD-310047DA4970}" type="datetimeFigureOut">
               <a:rPr lang="en-IN" smtClean="0"/>
-              <a:t>06-12-2025</a:t>
+              <a:t>17-08-2026</a:t>
             </a:fld>
             <a:endParaRPr lang="en-IN"/>
           </a:p>
@@ -873,7 +932,7 @@
           <a:p>
             <a:fld id="{A8B7FD77-64CE-4E94-98DD-310047DA4970}" type="datetimeFigureOut">
               <a:rPr lang="en-IN" smtClean="0"/>
-              <a:t>06-12-2025</a:t>
+              <a:t>17-08-2026</a:t>
             </a:fld>
             <a:endParaRPr lang="en-IN"/>
           </a:p>
@@ -1149,7 +1208,7 @@
           <a:p>
             <a:fld id="{A8B7FD77-64CE-4E94-98DD-310047DA4970}" type="datetimeFigureOut">
               <a:rPr lang="en-IN" smtClean="0"/>
-              <a:t>06-12-2025</a:t>
+              <a:t>17-08-2026</a:t>
             </a:fld>
             <a:endParaRPr lang="en-IN"/>
           </a:p>
@@ -1417,7 +1476,7 @@
           <a:p>
             <a:fld id="{A8B7FD77-64CE-4E94-98DD-310047DA4970}" type="datetimeFigureOut">
               <a:rPr lang="en-IN" smtClean="0"/>
-              <a:t>06-12-2025</a:t>
+              <a:t>17-08-2026</a:t>
             </a:fld>
             <a:endParaRPr lang="en-IN"/>
           </a:p>
@@ -1832,7 +1891,7 @@
           <a:p>
             <a:fld id="{A8B7FD77-64CE-4E94-98DD-310047DA4970}" type="datetimeFigureOut">
               <a:rPr lang="en-IN" smtClean="0"/>
-              <a:t>06-12-2025</a:t>
+              <a:t>17-08-2026</a:t>
             </a:fld>
             <a:endParaRPr lang="en-IN"/>
           </a:p>
@@ -1974,7 +2033,7 @@
           <a:p>
             <a:fld id="{A8B7FD77-64CE-4E94-98DD-310047DA4970}" type="datetimeFigureOut">
               <a:rPr lang="en-IN" smtClean="0"/>
-              <a:t>06-12-2025</a:t>
+              <a:t>17-08-2026</a:t>
             </a:fld>
             <a:endParaRPr lang="en-IN"/>
           </a:p>
@@ -2087,7 +2146,7 @@
           <a:p>
             <a:fld id="{A8B7FD77-64CE-4E94-98DD-310047DA4970}" type="datetimeFigureOut">
               <a:rPr lang="en-IN" smtClean="0"/>
-              <a:t>06-12-2025</a:t>
+              <a:t>17-08-2026</a:t>
             </a:fld>
             <a:endParaRPr lang="en-IN"/>
           </a:p>
@@ -2400,7 +2459,7 @@
           <a:p>
             <a:fld id="{A8B7FD77-64CE-4E94-98DD-310047DA4970}" type="datetimeFigureOut">
               <a:rPr lang="en-IN" smtClean="0"/>
-              <a:t>06-12-2025</a:t>
+              <a:t>17-08-2026</a:t>
             </a:fld>
             <a:endParaRPr lang="en-IN"/>
           </a:p>
@@ -2689,7 +2748,7 @@
           <a:p>
             <a:fld id="{A8B7FD77-64CE-4E94-98DD-310047DA4970}" type="datetimeFigureOut">
               <a:rPr lang="en-IN" smtClean="0"/>
-              <a:t>06-12-2025</a:t>
+              <a:t>17-08-2026</a:t>
             </a:fld>
             <a:endParaRPr lang="en-IN"/>
           </a:p>
@@ -2932,7 +2991,7 @@
           <a:p>
             <a:fld id="{A8B7FD77-64CE-4E94-98DD-310047DA4970}" type="datetimeFigureOut">
               <a:rPr lang="en-IN" smtClean="0"/>
-              <a:t>06-12-2025</a:t>
+              <a:t>17-08-2026</a:t>
             </a:fld>
             <a:endParaRPr lang="en-IN"/>
           </a:p>
@@ -4121,42 +4180,6 @@
           </a:p>
         </p:txBody>
       </p:sp>
-      <p:pic>
-        <p:nvPicPr>
-          <p:cNvPr id="13" name="Picture 12">
-            <a:extLst>
-              <a:ext uri="{FF2B5EF4-FFF2-40B4-BE49-F238E27FC236}">
-                <a16:creationId xmlns:a16="http://schemas.microsoft.com/office/drawing/2014/main" id="{736985F1-78C3-EC87-83A0-2D323CD4C9C0}"/>
-              </a:ext>
-            </a:extLst>
-          </p:cNvPr>
-          <p:cNvPicPr>
-            <a:picLocks noChangeAspect="1"/>
-          </p:cNvPicPr>
-          <p:nvPr/>
-        </p:nvPicPr>
-        <p:blipFill>
-          <a:blip r:embed="rId2">
-            <a:extLst>
-              <a:ext uri="{28A0092B-C50C-407E-A947-70E740481C1C}">
-                <a14:useLocalDpi xmlns:a14="http://schemas.microsoft.com/office/drawing/2010/main" val="0"/>
-              </a:ext>
-            </a:extLst>
-          </a:blip>
-          <a:stretch>
-            <a:fillRect/>
-          </a:stretch>
-        </p:blipFill>
-        <p:spPr>
-          <a:xfrm>
-            <a:off x="216015" y="6114979"/>
-            <a:ext cx="860309" cy="620857"/>
-          </a:xfrm>
-          <a:prstGeom prst="rect">
-            <a:avLst/>
-          </a:prstGeom>
-        </p:spPr>
-      </p:pic>
     </p:spTree>
     <p:extLst>
       <p:ext uri="{BB962C8B-B14F-4D97-AF65-F5344CB8AC3E}">
@@ -4669,42 +4692,6 @@
           </a:p>
         </p:txBody>
       </p:sp>
-      <p:pic>
-        <p:nvPicPr>
-          <p:cNvPr id="12" name="Picture 11">
-            <a:extLst>
-              <a:ext uri="{FF2B5EF4-FFF2-40B4-BE49-F238E27FC236}">
-                <a16:creationId xmlns:a16="http://schemas.microsoft.com/office/drawing/2014/main" id="{8D56A6E6-9FEB-E12A-1F6A-8FCBFFF9CFAD}"/>
-              </a:ext>
-            </a:extLst>
-          </p:cNvPr>
-          <p:cNvPicPr>
-            <a:picLocks noChangeAspect="1"/>
-          </p:cNvPicPr>
-          <p:nvPr/>
-        </p:nvPicPr>
-        <p:blipFill>
-          <a:blip r:embed="rId2">
-            <a:extLst>
-              <a:ext uri="{28A0092B-C50C-407E-A947-70E740481C1C}">
-                <a14:useLocalDpi xmlns:a14="http://schemas.microsoft.com/office/drawing/2010/main" val="0"/>
-              </a:ext>
-            </a:extLst>
-          </a:blip>
-          <a:stretch>
-            <a:fillRect/>
-          </a:stretch>
-        </p:blipFill>
-        <p:spPr>
-          <a:xfrm>
-            <a:off x="216015" y="6114979"/>
-            <a:ext cx="860309" cy="620857"/>
-          </a:xfrm>
-          <a:prstGeom prst="rect">
-            <a:avLst/>
-          </a:prstGeom>
-        </p:spPr>
-      </p:pic>
       <p:sp>
         <p:nvSpPr>
           <p:cNvPr id="4" name="Rectangle 1">
@@ -5799,42 +5786,6 @@
           </a:p>
         </p:txBody>
       </p:sp>
-      <p:pic>
-        <p:nvPicPr>
-          <p:cNvPr id="12" name="Picture 11">
-            <a:extLst>
-              <a:ext uri="{FF2B5EF4-FFF2-40B4-BE49-F238E27FC236}">
-                <a16:creationId xmlns:a16="http://schemas.microsoft.com/office/drawing/2014/main" id="{8D56A6E6-9FEB-E12A-1F6A-8FCBFFF9CFAD}"/>
-              </a:ext>
-            </a:extLst>
-          </p:cNvPr>
-          <p:cNvPicPr>
-            <a:picLocks noChangeAspect="1"/>
-          </p:cNvPicPr>
-          <p:nvPr/>
-        </p:nvPicPr>
-        <p:blipFill>
-          <a:blip r:embed="rId2">
-            <a:extLst>
-              <a:ext uri="{28A0092B-C50C-407E-A947-70E740481C1C}">
-                <a14:useLocalDpi xmlns:a14="http://schemas.microsoft.com/office/drawing/2010/main" val="0"/>
-              </a:ext>
-            </a:extLst>
-          </a:blip>
-          <a:stretch>
-            <a:fillRect/>
-          </a:stretch>
-        </p:blipFill>
-        <p:spPr>
-          <a:xfrm>
-            <a:off x="216015" y="6114979"/>
-            <a:ext cx="860309" cy="620857"/>
-          </a:xfrm>
-          <a:prstGeom prst="rect">
-            <a:avLst/>
-          </a:prstGeom>
-        </p:spPr>
-      </p:pic>
       <p:sp>
         <p:nvSpPr>
           <p:cNvPr id="3" name="Rectangle 1">
